--- a/go/go2009.pptx
+++ b/go/go2009.pptx
@@ -125,21 +125,12 @@
 </p:presentation>
 </file>
 
-<file path=ppt/revisionInfo.xml><?xml version="1.0" encoding="utf-8"?>
-<p1510:revInfo xmlns:a="http://schemas.openxmlformats.org/drawingml/2006/main" xmlns:r="http://schemas.openxmlformats.org/officeDocument/2006/relationships" xmlns:p1510="http://schemas.microsoft.com/office/powerpoint/2015/10/main">
-  <p1510:revLst>
-    <p1510:client id="{9203BCAB-DE64-AD4D-A416-9809AC7C2A3A}" v="3" dt="2026-05-25T00:06:13.110"/>
-    <p1510:client id="{9277CAC2-923E-1F4C-B8C7-D708FC223FB7}" v="3" dt="2026-05-25T18:26:38.195"/>
-  </p1510:revLst>
-</p1510:revInfo>
-</file>
-
 <file path=ppt/changesInfos/changesInfo1.xml><?xml version="1.0" encoding="utf-8"?>
 <pc:chgInfo xmlns:a="http://schemas.openxmlformats.org/drawingml/2006/main" xmlns:r="http://schemas.openxmlformats.org/officeDocument/2006/relationships" xmlns:ac="http://schemas.microsoft.com/office/drawing/2013/main/command" xmlns:pc="http://schemas.microsoft.com/office/powerpoint/2013/main/command">
   <pc:docChgLst>
     <pc:chgData name="Toby Donaldson" userId="2e6e5431-bb17-4c41-9985-d39c50d83c73" providerId="ADAL" clId="{F31BC264-820E-54C4-A6D1-F92AF9CC222E}"/>
     <pc:docChg chg="custSel addSld modSld">
-      <pc:chgData name="Toby Donaldson" userId="2e6e5431-bb17-4c41-9985-d39c50d83c73" providerId="ADAL" clId="{F31BC264-820E-54C4-A6D1-F92AF9CC222E}" dt="2026-05-25T00:57:03.452" v="94" actId="20577"/>
+      <pc:chgData name="Toby Donaldson" userId="2e6e5431-bb17-4c41-9985-d39c50d83c73" providerId="ADAL" clId="{F31BC264-820E-54C4-A6D1-F92AF9CC222E}" dt="2026-05-28T23:31:33.651" v="141" actId="14100"/>
       <pc:docMkLst>
         <pc:docMk/>
       </pc:docMkLst>
@@ -155,22 +146,6 @@
             <pc:docMk/>
             <pc:sldMk cId="247949623" sldId="261"/>
             <ac:spMk id="3" creationId="{E45AFAE3-7D9D-4DB0-A01B-CD046F1E7D5F}"/>
-          </ac:spMkLst>
-        </pc:spChg>
-        <pc:spChg chg="del">
-          <ac:chgData name="Toby Donaldson" userId="2e6e5431-bb17-4c41-9985-d39c50d83c73" providerId="ADAL" clId="{F31BC264-820E-54C4-A6D1-F92AF9CC222E}" dt="2026-05-25T00:56:16.945" v="80" actId="21"/>
-          <ac:spMkLst>
-            <pc:docMk/>
-            <pc:sldMk cId="247949623" sldId="261"/>
-            <ac:spMk id="4" creationId="{6B61A8D3-4B08-471E-9F40-F5FE22F6431B}"/>
-          </ac:spMkLst>
-        </pc:spChg>
-        <pc:spChg chg="del">
-          <ac:chgData name="Toby Donaldson" userId="2e6e5431-bb17-4c41-9985-d39c50d83c73" providerId="ADAL" clId="{F31BC264-820E-54C4-A6D1-F92AF9CC222E}" dt="2026-05-25T00:56:16.945" v="80" actId="21"/>
-          <ac:spMkLst>
-            <pc:docMk/>
-            <pc:sldMk cId="247949623" sldId="261"/>
-            <ac:spMk id="5" creationId="{568288FB-8559-41AB-827C-D6A2E66D2804}"/>
           </ac:spMkLst>
         </pc:spChg>
       </pc:sldChg>
@@ -228,17 +203,25 @@
         </pc:spChg>
       </pc:sldChg>
       <pc:sldChg chg="modSp mod">
-        <pc:chgData name="Toby Donaldson" userId="2e6e5431-bb17-4c41-9985-d39c50d83c73" providerId="ADAL" clId="{F31BC264-820E-54C4-A6D1-F92AF9CC222E}" dt="2026-05-25T00:06:44.476" v="12" actId="14100"/>
+        <pc:chgData name="Toby Donaldson" userId="2e6e5431-bb17-4c41-9985-d39c50d83c73" providerId="ADAL" clId="{F31BC264-820E-54C4-A6D1-F92AF9CC222E}" dt="2026-05-28T23:31:33.651" v="141" actId="14100"/>
         <pc:sldMkLst>
           <pc:docMk/>
-          <pc:sldMk cId="1031835898" sldId="272"/>
+          <pc:sldMk cId="230914827" sldId="271"/>
         </pc:sldMkLst>
         <pc:spChg chg="mod">
-          <ac:chgData name="Toby Donaldson" userId="2e6e5431-bb17-4c41-9985-d39c50d83c73" providerId="ADAL" clId="{F31BC264-820E-54C4-A6D1-F92AF9CC222E}" dt="2026-05-25T00:06:44.476" v="12" actId="14100"/>
+          <ac:chgData name="Toby Donaldson" userId="2e6e5431-bb17-4c41-9985-d39c50d83c73" providerId="ADAL" clId="{F31BC264-820E-54C4-A6D1-F92AF9CC222E}" dt="2026-05-28T23:31:07.754" v="109" actId="20577"/>
           <ac:spMkLst>
             <pc:docMk/>
-            <pc:sldMk cId="1031835898" sldId="272"/>
-            <ac:spMk id="8" creationId="{E2400FBB-A4E6-4E19-BEB2-E43F372AEDD9}"/>
+            <pc:sldMk cId="230914827" sldId="271"/>
+            <ac:spMk id="3" creationId="{625907E2-02AB-4FC8-8372-75485A2CCADC}"/>
+          </ac:spMkLst>
+        </pc:spChg>
+        <pc:spChg chg="mod">
+          <ac:chgData name="Toby Donaldson" userId="2e6e5431-bb17-4c41-9985-d39c50d83c73" providerId="ADAL" clId="{F31BC264-820E-54C4-A6D1-F92AF9CC222E}" dt="2026-05-28T23:31:33.651" v="141" actId="14100"/>
+          <ac:spMkLst>
+            <pc:docMk/>
+            <pc:sldMk cId="230914827" sldId="271"/>
+            <ac:spMk id="4" creationId="{1AB9C04D-6CD3-48A5-BEAC-80EB44E5AF49}"/>
           </ac:spMkLst>
         </pc:spChg>
       </pc:sldChg>
@@ -248,14 +231,6 @@
           <pc:docMk/>
           <pc:sldMk cId="2446982689" sldId="275"/>
         </pc:sldMkLst>
-        <pc:picChg chg="del">
-          <ac:chgData name="Toby Donaldson" userId="2e6e5431-bb17-4c41-9985-d39c50d83c73" providerId="ADAL" clId="{F31BC264-820E-54C4-A6D1-F92AF9CC222E}" dt="2026-05-25T00:05:41.749" v="1" actId="21"/>
-          <ac:picMkLst>
-            <pc:docMk/>
-            <pc:sldMk cId="2446982689" sldId="275"/>
-            <ac:picMk id="2050" creationId="{C7453A7F-640F-479A-865E-D328594C0BB3}"/>
-          </ac:picMkLst>
-        </pc:picChg>
       </pc:sldChg>
       <pc:sldChg chg="delSp modAnim">
         <pc:chgData name="Toby Donaldson" userId="2e6e5431-bb17-4c41-9985-d39c50d83c73" providerId="ADAL" clId="{F31BC264-820E-54C4-A6D1-F92AF9CC222E}" dt="2026-05-25T00:06:13.110" v="5" actId="21"/>
@@ -263,22 +238,6 @@
           <pc:docMk/>
           <pc:sldMk cId="390346067" sldId="276"/>
         </pc:sldMkLst>
-        <pc:spChg chg="del">
-          <ac:chgData name="Toby Donaldson" userId="2e6e5431-bb17-4c41-9985-d39c50d83c73" providerId="ADAL" clId="{F31BC264-820E-54C4-A6D1-F92AF9CC222E}" dt="2026-05-25T00:06:13.110" v="5" actId="21"/>
-          <ac:spMkLst>
-            <pc:docMk/>
-            <pc:sldMk cId="390346067" sldId="276"/>
-            <ac:spMk id="3" creationId="{44141B78-E7ED-4D2B-B858-4927CEC46631}"/>
-          </ac:spMkLst>
-        </pc:spChg>
-        <pc:picChg chg="del">
-          <ac:chgData name="Toby Donaldson" userId="2e6e5431-bb17-4c41-9985-d39c50d83c73" providerId="ADAL" clId="{F31BC264-820E-54C4-A6D1-F92AF9CC222E}" dt="2026-05-25T00:06:13.110" v="5" actId="21"/>
-          <ac:picMkLst>
-            <pc:docMk/>
-            <pc:sldMk cId="390346067" sldId="276"/>
-            <ac:picMk id="3074" creationId="{ED48D2A1-A8F0-4421-8E7C-B34758DB1664}"/>
-          </ac:picMkLst>
-        </pc:picChg>
       </pc:sldChg>
       <pc:sldChg chg="delSp modAnim">
         <pc:chgData name="Toby Donaldson" userId="2e6e5431-bb17-4c41-9985-d39c50d83c73" providerId="ADAL" clId="{F31BC264-820E-54C4-A6D1-F92AF9CC222E}" dt="2026-05-25T00:06:01.116" v="3" actId="21"/>
@@ -286,22 +245,6 @@
           <pc:docMk/>
           <pc:sldMk cId="4198230947" sldId="277"/>
         </pc:sldMkLst>
-        <pc:spChg chg="del">
-          <ac:chgData name="Toby Donaldson" userId="2e6e5431-bb17-4c41-9985-d39c50d83c73" providerId="ADAL" clId="{F31BC264-820E-54C4-A6D1-F92AF9CC222E}" dt="2026-05-25T00:06:01.116" v="3" actId="21"/>
-          <ac:spMkLst>
-            <pc:docMk/>
-            <pc:sldMk cId="4198230947" sldId="277"/>
-            <ac:spMk id="5" creationId="{8F75B901-2123-4EAE-9F0D-2187CE35C7C4}"/>
-          </ac:spMkLst>
-        </pc:spChg>
-        <pc:picChg chg="del">
-          <ac:chgData name="Toby Donaldson" userId="2e6e5431-bb17-4c41-9985-d39c50d83c73" providerId="ADAL" clId="{F31BC264-820E-54C4-A6D1-F92AF9CC222E}" dt="2026-05-25T00:06:01.116" v="3" actId="21"/>
-          <ac:picMkLst>
-            <pc:docMk/>
-            <pc:sldMk cId="4198230947" sldId="277"/>
-            <ac:picMk id="1026" creationId="{688D9953-FA34-4BD7-B2A8-BD81E65A7770}"/>
-          </ac:picMkLst>
-        </pc:picChg>
       </pc:sldChg>
       <pc:sldChg chg="add">
         <pc:chgData name="Toby Donaldson" userId="2e6e5431-bb17-4c41-9985-d39c50d83c73" providerId="ADAL" clId="{F31BC264-820E-54C4-A6D1-F92AF9CC222E}" dt="2026-05-25T00:05:37.304" v="0" actId="2890"/>
@@ -333,13 +276,6 @@
       <pc:docMkLst>
         <pc:docMk/>
       </pc:docMkLst>
-      <pc:sldChg chg="del">
-        <pc:chgData name="Toby Donaldson" userId="2e6e5431-bb17-4c41-9985-d39c50d83c73" providerId="ADAL" clId="{7F9681A8-EEE2-56F4-9B39-ECCBEE0471AC}" dt="2026-05-25T18:20:19.272" v="0" actId="2696"/>
-        <pc:sldMkLst>
-          <pc:docMk/>
-          <pc:sldMk cId="1031835898" sldId="272"/>
-        </pc:sldMkLst>
-      </pc:sldChg>
       <pc:sldChg chg="modSp mod">
         <pc:chgData name="Toby Donaldson" userId="2e6e5431-bb17-4c41-9985-d39c50d83c73" providerId="ADAL" clId="{7F9681A8-EEE2-56F4-9B39-ECCBEE0471AC}" dt="2026-05-25T18:26:38.194" v="2" actId="20577"/>
         <pc:sldMkLst>
@@ -509,7 +445,7 @@
           <a:p>
             <a:fld id="{C65E533D-5A30-424C-ADAA-EBA918E78813}" type="datetimeFigureOut">
               <a:rPr lang="en-AU" smtClean="0"/>
-              <a:t>25/05/2026</a:t>
+              <a:t>28/5/2026</a:t>
             </a:fld>
             <a:endParaRPr lang="en-AU"/>
           </a:p>
@@ -709,7 +645,7 @@
           <a:p>
             <a:fld id="{C65E533D-5A30-424C-ADAA-EBA918E78813}" type="datetimeFigureOut">
               <a:rPr lang="en-AU" smtClean="0"/>
-              <a:t>25/05/2026</a:t>
+              <a:t>28/5/2026</a:t>
             </a:fld>
             <a:endParaRPr lang="en-AU"/>
           </a:p>
@@ -919,7 +855,7 @@
           <a:p>
             <a:fld id="{C65E533D-5A30-424C-ADAA-EBA918E78813}" type="datetimeFigureOut">
               <a:rPr lang="en-AU" smtClean="0"/>
-              <a:t>25/05/2026</a:t>
+              <a:t>28/5/2026</a:t>
             </a:fld>
             <a:endParaRPr lang="en-AU"/>
           </a:p>
@@ -1119,7 +1055,7 @@
           <a:p>
             <a:fld id="{C65E533D-5A30-424C-ADAA-EBA918E78813}" type="datetimeFigureOut">
               <a:rPr lang="en-AU" smtClean="0"/>
-              <a:t>25/05/2026</a:t>
+              <a:t>28/5/2026</a:t>
             </a:fld>
             <a:endParaRPr lang="en-AU"/>
           </a:p>
@@ -1395,7 +1331,7 @@
           <a:p>
             <a:fld id="{C65E533D-5A30-424C-ADAA-EBA918E78813}" type="datetimeFigureOut">
               <a:rPr lang="en-AU" smtClean="0"/>
-              <a:t>25/05/2026</a:t>
+              <a:t>28/5/2026</a:t>
             </a:fld>
             <a:endParaRPr lang="en-AU"/>
           </a:p>
@@ -1663,7 +1599,7 @@
           <a:p>
             <a:fld id="{C65E533D-5A30-424C-ADAA-EBA918E78813}" type="datetimeFigureOut">
               <a:rPr lang="en-AU" smtClean="0"/>
-              <a:t>25/05/2026</a:t>
+              <a:t>28/5/2026</a:t>
             </a:fld>
             <a:endParaRPr lang="en-AU"/>
           </a:p>
@@ -2078,7 +2014,7 @@
           <a:p>
             <a:fld id="{C65E533D-5A30-424C-ADAA-EBA918E78813}" type="datetimeFigureOut">
               <a:rPr lang="en-AU" smtClean="0"/>
-              <a:t>25/05/2026</a:t>
+              <a:t>28/5/2026</a:t>
             </a:fld>
             <a:endParaRPr lang="en-AU"/>
           </a:p>
@@ -2220,7 +2156,7 @@
           <a:p>
             <a:fld id="{C65E533D-5A30-424C-ADAA-EBA918E78813}" type="datetimeFigureOut">
               <a:rPr lang="en-AU" smtClean="0"/>
-              <a:t>25/05/2026</a:t>
+              <a:t>28/5/2026</a:t>
             </a:fld>
             <a:endParaRPr lang="en-AU"/>
           </a:p>
@@ -2333,7 +2269,7 @@
           <a:p>
             <a:fld id="{C65E533D-5A30-424C-ADAA-EBA918E78813}" type="datetimeFigureOut">
               <a:rPr lang="en-AU" smtClean="0"/>
-              <a:t>25/05/2026</a:t>
+              <a:t>28/5/2026</a:t>
             </a:fld>
             <a:endParaRPr lang="en-AU"/>
           </a:p>
@@ -2646,7 +2582,7 @@
           <a:p>
             <a:fld id="{C65E533D-5A30-424C-ADAA-EBA918E78813}" type="datetimeFigureOut">
               <a:rPr lang="en-AU" smtClean="0"/>
-              <a:t>25/05/2026</a:t>
+              <a:t>28/5/2026</a:t>
             </a:fld>
             <a:endParaRPr lang="en-AU"/>
           </a:p>
@@ -2935,7 +2871,7 @@
           <a:p>
             <a:fld id="{C65E533D-5A30-424C-ADAA-EBA918E78813}" type="datetimeFigureOut">
               <a:rPr lang="en-AU" smtClean="0"/>
-              <a:t>25/05/2026</a:t>
+              <a:t>28/5/2026</a:t>
             </a:fld>
             <a:endParaRPr lang="en-AU"/>
           </a:p>
@@ -3178,7 +3114,7 @@
           <a:p>
             <a:fld id="{C65E533D-5A30-424C-ADAA-EBA918E78813}" type="datetimeFigureOut">
               <a:rPr lang="en-AU" smtClean="0"/>
-              <a:t>25/05/2026</a:t>
+              <a:t>28/5/2026</a:t>
             </a:fld>
             <a:endParaRPr lang="en-AU"/>
           </a:p>
@@ -6679,18 +6615,18 @@
               <a:buNone/>
             </a:pPr>
             <a:r>
-              <a:rPr lang="en-AU">
+              <a:rPr lang="en-AU" dirty="0">
                 <a:latin typeface="Consolas" panose="020B0609020204030204" pitchFamily="49" charset="0"/>
               </a:rPr>
               <a:t>// </a:t>
             </a:r>
             <a:r>
-              <a:rPr lang="en-AU" err="1">
+              <a:rPr lang="en-AU" dirty="0" err="1">
                 <a:latin typeface="Consolas" panose="020B0609020204030204" pitchFamily="49" charset="0"/>
               </a:rPr>
-              <a:t>hello_world.go</a:t>
-            </a:r>
-            <a:endParaRPr lang="en-AU">
+              <a:t>main.go</a:t>
+            </a:r>
+            <a:endParaRPr lang="en-AU" dirty="0">
               <a:latin typeface="Consolas" panose="020B0609020204030204" pitchFamily="49" charset="0"/>
             </a:endParaRPr>
           </a:p>
@@ -6698,7 +6634,7 @@
             <a:pPr marL="0" indent="0">
               <a:buNone/>
             </a:pPr>
-            <a:endParaRPr lang="en-AU">
+            <a:endParaRPr lang="en-AU" dirty="0">
               <a:latin typeface="Consolas" panose="020B0609020204030204" pitchFamily="49" charset="0"/>
             </a:endParaRPr>
           </a:p>
@@ -6707,7 +6643,7 @@
               <a:buNone/>
             </a:pPr>
             <a:r>
-              <a:rPr lang="en-AU">
+              <a:rPr lang="en-AU" dirty="0">
                 <a:latin typeface="Consolas" panose="020B0609020204030204" pitchFamily="49" charset="0"/>
               </a:rPr>
               <a:t>package main</a:t>
@@ -6717,7 +6653,7 @@
             <a:pPr marL="0" indent="0">
               <a:buNone/>
             </a:pPr>
-            <a:endParaRPr lang="en-AU">
+            <a:endParaRPr lang="en-AU" dirty="0">
               <a:latin typeface="Consolas" panose="020B0609020204030204" pitchFamily="49" charset="0"/>
             </a:endParaRPr>
           </a:p>
@@ -6726,19 +6662,19 @@
               <a:buNone/>
             </a:pPr>
             <a:r>
-              <a:rPr lang="en-AU">
+              <a:rPr lang="en-AU" dirty="0">
                 <a:latin typeface="Consolas" panose="020B0609020204030204" pitchFamily="49" charset="0"/>
               </a:rPr>
               <a:t>import "</a:t>
             </a:r>
             <a:r>
-              <a:rPr lang="en-AU" err="1">
+              <a:rPr lang="en-AU" dirty="0" err="1">
                 <a:latin typeface="Consolas" panose="020B0609020204030204" pitchFamily="49" charset="0"/>
               </a:rPr>
               <a:t>fmt</a:t>
             </a:r>
             <a:r>
-              <a:rPr lang="en-AU">
+              <a:rPr lang="en-AU" dirty="0">
                 <a:latin typeface="Consolas" panose="020B0609020204030204" pitchFamily="49" charset="0"/>
               </a:rPr>
               <a:t>"</a:t>
@@ -6748,7 +6684,7 @@
             <a:pPr marL="0" indent="0">
               <a:buNone/>
             </a:pPr>
-            <a:endParaRPr lang="en-AU">
+            <a:endParaRPr lang="en-AU" dirty="0">
               <a:latin typeface="Consolas" panose="020B0609020204030204" pitchFamily="49" charset="0"/>
             </a:endParaRPr>
           </a:p>
@@ -6757,13 +6693,13 @@
               <a:buNone/>
             </a:pPr>
             <a:r>
-              <a:rPr lang="en-AU" err="1">
+              <a:rPr lang="en-AU" dirty="0" err="1">
                 <a:latin typeface="Consolas" panose="020B0609020204030204" pitchFamily="49" charset="0"/>
               </a:rPr>
               <a:t>func</a:t>
             </a:r>
             <a:r>
-              <a:rPr lang="en-AU">
+              <a:rPr lang="en-AU" dirty="0">
                 <a:latin typeface="Consolas" panose="020B0609020204030204" pitchFamily="49" charset="0"/>
               </a:rPr>
               <a:t> main() {</a:t>
@@ -6774,19 +6710,19 @@
               <a:buNone/>
             </a:pPr>
             <a:r>
-              <a:rPr lang="en-AU">
+              <a:rPr lang="en-AU" dirty="0">
                 <a:latin typeface="Consolas" panose="020B0609020204030204" pitchFamily="49" charset="0"/>
               </a:rPr>
               <a:t>    </a:t>
             </a:r>
             <a:r>
-              <a:rPr lang="en-AU" err="1">
+              <a:rPr lang="en-AU" dirty="0" err="1">
                 <a:latin typeface="Consolas" panose="020B0609020204030204" pitchFamily="49" charset="0"/>
               </a:rPr>
               <a:t>fmt.Println</a:t>
             </a:r>
             <a:r>
-              <a:rPr lang="en-AU">
+              <a:rPr lang="en-AU" dirty="0">
                 <a:latin typeface="Consolas" panose="020B0609020204030204" pitchFamily="49" charset="0"/>
               </a:rPr>
               <a:t>("Hello, world!")</a:t>
@@ -6797,7 +6733,7 @@
               <a:buNone/>
             </a:pPr>
             <a:r>
-              <a:rPr lang="en-AU">
+              <a:rPr lang="en-AU" dirty="0">
                 <a:latin typeface="Consolas" panose="020B0609020204030204" pitchFamily="49" charset="0"/>
               </a:rPr>
               <a:t>}</a:t>
@@ -6819,8 +6755,8 @@
         </p:nvSpPr>
         <p:spPr>
           <a:xfrm>
-            <a:off x="366029" y="1833789"/>
-            <a:ext cx="2452009" cy="646331"/>
+            <a:off x="366030" y="1833789"/>
+            <a:ext cx="2015664" cy="369332"/>
           </a:xfrm>
           <a:prstGeom prst="rect">
             <a:avLst/>
@@ -6839,25 +6775,14 @@
           <a:lstStyle/>
           <a:p>
             <a:r>
-              <a:rPr lang="en-CA"/>
+              <a:rPr lang="en-CA" dirty="0"/>
               <a:t>$ go run </a:t>
             </a:r>
             <a:r>
-              <a:rPr lang="en-CA" err="1"/>
-              <a:t>hello_world.go</a:t>
-            </a:r>
-            <a:endParaRPr lang="en-CA"/>
-          </a:p>
-          <a:p>
-            <a:r>
-              <a:rPr lang="en-AU"/>
-              <a:t>$ ./</a:t>
-            </a:r>
-            <a:r>
-              <a:rPr lang="en-AU" err="1"/>
-              <a:t>hello_world</a:t>
-            </a:r>
-            <a:endParaRPr lang="en-AU"/>
+              <a:rPr lang="en-CA" dirty="0" err="1"/>
+              <a:t>main.go</a:t>
+            </a:r>
+            <a:endParaRPr lang="en-CA" dirty="0"/>
           </a:p>
         </p:txBody>
       </p:sp>
@@ -8471,4 +8396,10 @@
     </a:ext>
   </a:extLst>
 </a:theme>
+</file>
+
+<file path=docMetadata/LabelInfo.xml><?xml version="1.0" encoding="utf-8"?>
+<clbl:labelList xmlns:clbl="http://schemas.microsoft.com/office/2020/mipLabelMetadata">
+  <clbl:label id="{04e8677e-c989-47b9-8619-d83d5a5f6c67}" enabled="0" method="" siteId="{04e8677e-c989-47b9-8619-d83d5a5f6c67}" removed="1"/>
+</clbl:labelList>
 </file>